--- a/lectures/week_11_model_selection/le111_model_selection.pptx
+++ b/lectures/week_11_model_selection/le111_model_selection.pptx
@@ -313,7 +313,7 @@
           <a:p>
             <a:fld id="{F00CAE13-515D-42AB-B1C6-C768CFAA9040}" type="datetimeFigureOut">
               <a:rPr lang="en-US" smtClean="0"/>
-              <a:t>4/1/24</a:t>
+              <a:t>4/6/26</a:t>
             </a:fld>
             <a:endParaRPr lang="en-US"/>
           </a:p>
@@ -714,7 +714,7 @@
             <a:fld id="{F16B42BE-E9E8-4C91-8CAE-DCF3A8462AA2}" type="datetimeFigureOut">
               <a:rPr lang="en-US" smtClean="0"/>
               <a:pPr/>
-              <a:t>4/1/24</a:t>
+              <a:t>4/6/26</a:t>
             </a:fld>
             <a:endParaRPr lang="en-US"/>
           </a:p>
@@ -886,7 +886,7 @@
             <a:fld id="{F16B42BE-E9E8-4C91-8CAE-DCF3A8462AA2}" type="datetimeFigureOut">
               <a:rPr lang="en-US" smtClean="0"/>
               <a:pPr/>
-              <a:t>4/1/24</a:t>
+              <a:t>4/6/26</a:t>
             </a:fld>
             <a:endParaRPr lang="en-US"/>
           </a:p>
@@ -1068,7 +1068,7 @@
             <a:fld id="{F16B42BE-E9E8-4C91-8CAE-DCF3A8462AA2}" type="datetimeFigureOut">
               <a:rPr lang="en-US" smtClean="0"/>
               <a:pPr/>
-              <a:t>4/1/24</a:t>
+              <a:t>4/6/26</a:t>
             </a:fld>
             <a:endParaRPr lang="en-US"/>
           </a:p>
@@ -1258,7 +1258,7 @@
             <a:fld id="{F16B42BE-E9E8-4C91-8CAE-DCF3A8462AA2}" type="datetimeFigureOut">
               <a:rPr lang="en-US" smtClean="0"/>
               <a:pPr/>
-              <a:t>4/1/24</a:t>
+              <a:t>4/6/26</a:t>
             </a:fld>
             <a:endParaRPr lang="en-US"/>
           </a:p>
@@ -1504,7 +1504,7 @@
             <a:fld id="{F16B42BE-E9E8-4C91-8CAE-DCF3A8462AA2}" type="datetimeFigureOut">
               <a:rPr lang="en-US" smtClean="0"/>
               <a:pPr/>
-              <a:t>4/1/24</a:t>
+              <a:t>4/6/26</a:t>
             </a:fld>
             <a:endParaRPr lang="en-US"/>
           </a:p>
@@ -1738,7 +1738,7 @@
             <a:fld id="{F16B42BE-E9E8-4C91-8CAE-DCF3A8462AA2}" type="datetimeFigureOut">
               <a:rPr lang="en-US" smtClean="0"/>
               <a:pPr/>
-              <a:t>4/1/24</a:t>
+              <a:t>4/6/26</a:t>
             </a:fld>
             <a:endParaRPr lang="en-US"/>
           </a:p>
@@ -2107,7 +2107,7 @@
             <a:fld id="{F16B42BE-E9E8-4C91-8CAE-DCF3A8462AA2}" type="datetimeFigureOut">
               <a:rPr lang="en-US" smtClean="0"/>
               <a:pPr/>
-              <a:t>4/1/24</a:t>
+              <a:t>4/6/26</a:t>
             </a:fld>
             <a:endParaRPr lang="en-US"/>
           </a:p>
@@ -2227,7 +2227,7 @@
             <a:fld id="{F16B42BE-E9E8-4C91-8CAE-DCF3A8462AA2}" type="datetimeFigureOut">
               <a:rPr lang="en-US" smtClean="0"/>
               <a:pPr/>
-              <a:t>4/1/24</a:t>
+              <a:t>4/6/26</a:t>
             </a:fld>
             <a:endParaRPr lang="en-US"/>
           </a:p>
@@ -2324,7 +2324,7 @@
             <a:fld id="{F16B42BE-E9E8-4C91-8CAE-DCF3A8462AA2}" type="datetimeFigureOut">
               <a:rPr lang="en-US" smtClean="0"/>
               <a:pPr/>
-              <a:t>4/1/24</a:t>
+              <a:t>4/6/26</a:t>
             </a:fld>
             <a:endParaRPr lang="en-US"/>
           </a:p>
@@ -2603,7 +2603,7 @@
             <a:fld id="{F16B42BE-E9E8-4C91-8CAE-DCF3A8462AA2}" type="datetimeFigureOut">
               <a:rPr lang="en-US" smtClean="0"/>
               <a:pPr/>
-              <a:t>4/1/24</a:t>
+              <a:t>4/6/26</a:t>
             </a:fld>
             <a:endParaRPr lang="en-US"/>
           </a:p>
@@ -2862,7 +2862,7 @@
             <a:fld id="{F16B42BE-E9E8-4C91-8CAE-DCF3A8462AA2}" type="datetimeFigureOut">
               <a:rPr lang="en-US" smtClean="0"/>
               <a:pPr/>
-              <a:t>4/1/24</a:t>
+              <a:t>4/6/26</a:t>
             </a:fld>
             <a:endParaRPr lang="en-US"/>
           </a:p>
@@ -3075,7 +3075,7 @@
             <a:fld id="{F16B42BE-E9E8-4C91-8CAE-DCF3A8462AA2}" type="datetimeFigureOut">
               <a:rPr lang="en-US" smtClean="0"/>
               <a:pPr/>
-              <a:t>4/1/24</a:t>
+              <a:t>4/6/26</a:t>
             </a:fld>
             <a:endParaRPr lang="en-US"/>
           </a:p>
@@ -5163,7 +5163,7 @@
           <a:lstStyle/>
           <a:p>
             <a:r>
-              <a:rPr lang="en-US" b="1" dirty="0"/>
+              <a:rPr lang="en-US" dirty="0"/>
               <a:t>Model comparison - LRT</a:t>
             </a:r>
           </a:p>
